--- a/en/slides/00-Computer_Architecture-Course_Introduction-Code.pptx
+++ b/en/slides/00-Computer_Architecture-Course_Introduction-Code.pptx
@@ -116,24 +116,24 @@
   <p:extLst>
     <p:ext uri="{521415D9-36F7-43E2-AB2F-B90AF26B5E84}">
       <p14:sectionLst xmlns:p14="http://schemas.microsoft.com/office/powerpoint/2010/main">
-        <p14:section name="Opening" id="{619bc39e-80e3-727d-ca80-5f9e8790ba43}">
+        <p14:section name="Opening" id="{4e3e8e16-4a7f-586b-fedb-fccc0894ca31}">
           <p14:sldIdLst>
             <p14:sldId id="256"/>
             <p14:sldId id="257"/>
           </p14:sldIdLst>
         </p14:section>
-        <p14:section name="The listings" id="{257f8583-d69a-f6da-ae01-40922d87a123}">
+        <p14:section name="Material and first contact" id="{bcd1a191-d873-33e6-4a2c-6122d90d7b20}">
           <p14:sldIdLst>
             <p14:sldId id="258"/>
           </p14:sldIdLst>
         </p14:section>
-        <p14:section name="The complete program" id="{356dfa23-4577-f6e0-b8be-0cf00d851bd6}">
+        <p14:section name="The complete program" id="{2b6cab4b-4074-cd59-04f0-4c7a8e0ab60e}">
           <p14:sldIdLst>
             <p14:sldId id="259"/>
             <p14:sldId id="260"/>
           </p14:sldIdLst>
         </p14:section>
-        <p14:section name="Run it and test it" id="{4a079628-28ed-eb7b-2fbf-4392b53f28e1}">
+        <p14:section name="Run it and test it" id="{6586402f-fa78-2b37-59c2-61989c57fe49}">
           <p14:sldIdLst>
             <p14:sldId id="261"/>
             <p14:sldId id="262"/>
@@ -2321,7 +2321,63 @@
       </p:sp>
       <p:sp>
         <p:nvSpPr>
-          <p:cNvPr id="11" name="Shape 9"/>
+          <p:cNvPr id="11" name="Text 9"/>
+          <p:cNvSpPr txBox="1"/>
+          <p:nvPr/>
+        </p:nvSpPr>
+        <p:spPr>
+          <a:xfrm>
+            <a:off x="4693615" y="566928"/>
+            <a:ext cx="6949440" cy="640080"/>
+          </a:xfrm>
+          <a:prstGeom prst="rect">
+            <a:avLst/>
+          </a:prstGeom>
+          <a:noFill/>
+          <a:ln/>
+        </p:spPr>
+        <p:txBody>
+          <a:bodyPr wrap="square" lIns="0" tIns="0" rIns="0" bIns="0" rtlCol="0" anchor="t"/>
+          <a:lstStyle/>
+          <a:p>
+            <a:pPr algn="r" indent="0" marL="0">
+              <a:buNone/>
+            </a:pPr>
+            <a:r>
+              <a:rPr lang="en-US" sz="1300" dirty="0">
+                <a:solidFill>
+                  <a:srgbClr val="CFE3EA"/>
+                </a:solidFill>
+                <a:latin typeface="Calibri" pitchFamily="34" charset="0"/>
+                <a:ea typeface="Calibri" pitchFamily="34" charset="-122"/>
+                <a:cs typeface="Calibri" pitchFamily="34" charset="-120"/>
+              </a:rPr>
+              <a:t>Code deck. The concepts, the figures and the questions are in the lecture deck:</a:t>
+            </a:r>
+            <a:endParaRPr lang="en-US" sz="1300" dirty="0"/>
+          </a:p>
+          <a:p>
+            <a:pPr algn="r" indent="0" marL="0">
+              <a:buNone/>
+            </a:pPr>
+            <a:r>
+              <a:rPr lang="en-US" sz="1300" dirty="0">
+                <a:solidFill>
+                  <a:srgbClr val="CFE3EA"/>
+                </a:solidFill>
+                <a:latin typeface="Calibri" pitchFamily="34" charset="0"/>
+                <a:ea typeface="Calibri" pitchFamily="34" charset="-122"/>
+                <a:cs typeface="Calibri" pitchFamily="34" charset="-120"/>
+              </a:rPr>
+              <a:t>00-Computer_Architecture-Course_Introduction.pptx</a:t>
+            </a:r>
+            <a:endParaRPr lang="en-US" sz="1300" dirty="0"/>
+          </a:p>
+        </p:txBody>
+      </p:sp>
+      <p:sp>
+        <p:nvSpPr>
+          <p:cNvPr id="12" name="Shape 10"/>
           <p:cNvSpPr/>
           <p:nvPr/>
         </p:nvSpPr>
@@ -2348,7 +2404,7 @@
       </p:sp>
       <p:pic>
         <p:nvPicPr>
-          <p:cNvPr id="12" name="Image 0" descr="/Users/raffaelemontella/devel/riscv-prg32/computer-architecture-with-prg32/tools/assets/prg32_logo.png">    </p:cNvPr>
+          <p:cNvPr id="13" name="Image 0" descr="/Users/raffaelemontella/devel/riscv-prg32/computer-architecture-with-prg32/tools/assets/prg32_logo.png">    </p:cNvPr>
           <p:cNvPicPr>
             <a:picLocks noChangeAspect="1"/>
           </p:cNvPicPr>

--- a/en/slides/00-Computer_Architecture-Course_Introduction-Code.pptx
+++ b/en/slides/00-Computer_Architecture-Course_Introduction-Code.pptx
@@ -116,24 +116,24 @@
   <p:extLst>
     <p:ext uri="{521415D9-36F7-43E2-AB2F-B90AF26B5E84}">
       <p14:sectionLst xmlns:p14="http://schemas.microsoft.com/office/powerpoint/2010/main">
-        <p14:section name="Opening" id="{4e3e8e16-4a7f-586b-fedb-fccc0894ca31}">
+        <p14:section name="Opening" id="{36258862-6859-27cd-fd8e-3551376115ab}">
           <p14:sldIdLst>
             <p14:sldId id="256"/>
             <p14:sldId id="257"/>
           </p14:sldIdLst>
         </p14:section>
-        <p14:section name="Material and first contact" id="{bcd1a191-d873-33e6-4a2c-6122d90d7b20}">
+        <p14:section name="Material and first contact" id="{d11b5065-2150-1e9b-b19d-09b591d6e888}">
           <p14:sldIdLst>
             <p14:sldId id="258"/>
           </p14:sldIdLst>
         </p14:section>
-        <p14:section name="The complete program" id="{2b6cab4b-4074-cd59-04f0-4c7a8e0ab60e}">
+        <p14:section name="The complete program" id="{d3c1d01e-1a36-eafb-2021-5732982d0a86}">
           <p14:sldIdLst>
             <p14:sldId id="259"/>
             <p14:sldId id="260"/>
           </p14:sldIdLst>
         </p14:section>
-        <p14:section name="Run it and test it" id="{6586402f-fa78-2b37-59c2-61989c57fe49}">
+        <p14:section name="Run it and test it" id="{80a4b8a9-d3f9-1223-64a5-3e9b87790bd6}">
           <p14:sldIdLst>
             <p14:sldId id="261"/>
             <p14:sldId id="262"/>
@@ -546,7 +546,9 @@
           <a:p>
             <a:r>
               <a:rPr lang="en-US" dirty="0"/>
-              <a:t>This is the code deck of Lecture 00. The lecture deck holds the concepts; this one holds everything you type and run: the listings with their explanation, the complete program, what it shows, and the way to test it on each of the three hosts.</a:t>
+              <a:t>This is the code deck of Lecture 00. The lecture deck holds the concepts; this one holds everything you type and run: the listings with their explanation, the complete program, what it shows, and the way to test it on each of the three hosts.
+Learning status: UNDERSTAND NOW, by the end of this lecture you explain it, trace it and apply it on your own; USE NOW, you follow and use the recipe today; how it works inside is explained later, or is not part of the course; UNDERSTAND LATER, recognise the name and what it is for; a later lecture explains it. A slide without a badge is context: a story, an example, a question, an exercise.
+Learning status of this lecture. UNDERSTAND NOW: the program-first method; the rules of the course. USE NOW: the complete program, the PRG32 tools (used, not studied, in this course). UNDERSTAND LATER: the pieces of PRG32 (Lecture 01); RISC and an open ISA (Lecture 03); the Verm1 project (Lecture 07). A slide without a badge is context: a story, an example, a question, an exercise.</a:t>
             </a:r>
             <a:endParaRPr lang="en-US" dirty="0"/>
           </a:p>
@@ -635,6 +637,7 @@
             <a:r>
               <a:rPr lang="en-US" dirty="0"/>
               <a:t>The five most common symptoms, what each means, and what to do. Read the message before changing anything: it nearly always names the cause.
+USE NOW: the PRG32 tools (used, not studied, in this course).
 For the lecturer: The first three rows cover most cases. When asking for help, paste the command and the whole message as text. docs/usage/troubleshooting.md of the PRG32 repository has the complete list.</a:t>
             </a:r>
             <a:endParaRPr lang="en-US" dirty="0"/>
@@ -902,6 +905,7 @@
             <a:r>
               <a:rPr lang="en-US" dirty="0"/>
               <a:t>One page of the complete program, exactly as it is in the repository. Read it from the top: the header says what the program shows and how to build it; the three functions init, update and draw follow, then the data. Lines that you met in the listings of the lecture have the same comments here.
+USE NOW: the complete program (used, not studied, in this course).
 For the lecturer: code/l00.S, as built and run by the tests. The comments are part of the program: read them with the code.</a:t>
             </a:r>
             <a:endParaRPr lang="en-US" dirty="0"/>
@@ -991,6 +995,7 @@
             <a:r>
               <a:rPr lang="en-US" dirty="0"/>
               <a:t>One page of the complete program, exactly as it is in the repository. Read it from the top: the header says what the program shows and how to build it; the three functions init, update and draw follow, then the data. Lines that you met in the listings of the lecture have the same comments here.
+USE NOW: the complete program (used, not studied, in this course).
 For the lecturer: code/l00.S, as built and run by the tests. The comments are part of the program: read them with the code.</a:t>
             </a:r>
             <a:endParaRPr lang="en-US" dirty="0"/>
@@ -1169,6 +1174,7 @@
             <a:r>
               <a:rPr lang="en-US" dirty="0"/>
               <a:t>The quickest way: PRG32-QT on your own computer. Four steps, each with its command. PRG32-QT behaves like a board on port 8080, which is why the upload command says esp32c6. With debug mode enabled you can stop at any instruction and read registers and memory.
+USE NOW: the PRG32 tools (used, not studied, in this course).
 For the lecturer: Run by the tests: the cartridge of this slide is built with this command and executed on the headless runner of PRG32-QT. Without the toolchain: import the .prg32 file in PRG32-QT and choose Run Cartridge. Keys: arrows or WASD for the joystick, Z or J for A, X or K for B, Enter for Start, Escape to go back to Setup.</a:t>
             </a:r>
             <a:endParaRPr lang="en-US" dirty="0"/>
@@ -1258,6 +1264,7 @@
             <a:r>
               <a:rPr lang="en-US" dirty="0"/>
               <a:t>The same program on the emulator. QEMU runs the real firmware on an emulated chip, so the cartridge must be built for the architecture qemu. Stage the cartridge while QEMU is closed. The firmware opens on the Setup menu: choose Run Cartridge and the slot. Remember that the keyboard is read by the terminal, not by the window with the picture.
+USE NOW: the PRG32 tools (used, not studied, in this course).
 For the lecturer: Checked by the tests up to the staging: the cartridge is built for the architecture qemu and accepted into the flash image of the emulator. What the emulator then shows is not checked automatically: Espressif QEMU needs its window. Since October 2026 the firmware starts on Setup: choose Run Cartridge, then cart0.</a:t>
             </a:r>
             <a:endParaRPr lang="en-US" dirty="0"/>
@@ -1347,6 +1354,7 @@
             <a:r>
               <a:rPr lang="en-US" dirty="0"/>
               <a:t>The same program on the kit. The firmware is written once, through USB; after that cartridges travel over Wi-Fi. The upload command is the one used for PRG32-QT with the address of the board. This is the only host that the automatic tests do not run: try it, and report what you see.
+USE NOW: the PRG32 tools (used, not studied, in this course).
 For the lecturer: Not run by the tests: there is no board on the test machine. The cartridge for the architecture esp32c6 is built by the tests; the steps are those of the PRG32 documentation. If the serial port is not found pass it explicitly. To use the Wi-Fi of the classroom: python3 -m prg32 wifi set --ssid NAME --password PASSWORD --mode sta.</a:t>
             </a:r>
             <a:endParaRPr lang="en-US" dirty="0"/>
@@ -2426,6 +2434,420 @@
           </a:prstGeom>
         </p:spPr>
       </p:pic>
+      <p:sp>
+        <p:nvSpPr>
+          <p:cNvPr id="14" name="Shape 11"/>
+          <p:cNvSpPr/>
+          <p:nvPr/>
+        </p:nvSpPr>
+        <p:spPr>
+          <a:xfrm>
+            <a:off x="9690303" y="91440"/>
+            <a:ext cx="1952752" cy="274320"/>
+          </a:xfrm>
+          <a:prstGeom prst="rect">
+            <a:avLst/>
+          </a:prstGeom>
+          <a:solidFill>
+            <a:srgbClr val="F3E8FF"/>
+          </a:solidFill>
+          <a:ln w="12700">
+            <a:solidFill>
+              <a:srgbClr val="7E22CE"/>
+            </a:solidFill>
+            <a:prstDash val="dash"/>
+          </a:ln>
+        </p:spPr>
+      </p:sp>
+      <p:sp>
+        <p:nvSpPr>
+          <p:cNvPr id="15" name="Shape 12"/>
+          <p:cNvSpPr/>
+          <p:nvPr/>
+        </p:nvSpPr>
+        <p:spPr>
+          <a:xfrm>
+            <a:off x="9717735" y="128016"/>
+            <a:ext cx="45720" cy="45720"/>
+          </a:xfrm>
+          <a:prstGeom prst="rect">
+            <a:avLst/>
+          </a:prstGeom>
+          <a:solidFill>
+            <a:srgbClr val="7E22CE"/>
+          </a:solidFill>
+          <a:ln w="12700">
+            <a:solidFill>
+              <a:srgbClr val="7E22CE"/>
+            </a:solidFill>
+            <a:prstDash val="solid"/>
+          </a:ln>
+        </p:spPr>
+      </p:sp>
+      <p:sp>
+        <p:nvSpPr>
+          <p:cNvPr id="16" name="Shape 13"/>
+          <p:cNvSpPr/>
+          <p:nvPr/>
+        </p:nvSpPr>
+        <p:spPr>
+          <a:xfrm>
+            <a:off x="9717735" y="205740"/>
+            <a:ext cx="45720" cy="45720"/>
+          </a:xfrm>
+          <a:prstGeom prst="rect">
+            <a:avLst/>
+          </a:prstGeom>
+          <a:solidFill>
+            <a:srgbClr val="7E22CE"/>
+          </a:solidFill>
+          <a:ln w="12700">
+            <a:solidFill>
+              <a:srgbClr val="7E22CE"/>
+            </a:solidFill>
+            <a:prstDash val="solid"/>
+          </a:ln>
+        </p:spPr>
+      </p:sp>
+      <p:sp>
+        <p:nvSpPr>
+          <p:cNvPr id="17" name="Shape 14"/>
+          <p:cNvSpPr/>
+          <p:nvPr/>
+        </p:nvSpPr>
+        <p:spPr>
+          <a:xfrm>
+            <a:off x="9717735" y="283464"/>
+            <a:ext cx="45720" cy="45720"/>
+          </a:xfrm>
+          <a:prstGeom prst="rect">
+            <a:avLst/>
+          </a:prstGeom>
+          <a:solidFill>
+            <a:srgbClr val="7E22CE"/>
+          </a:solidFill>
+          <a:ln w="12700">
+            <a:solidFill>
+              <a:srgbClr val="7E22CE"/>
+            </a:solidFill>
+            <a:prstDash val="solid"/>
+          </a:ln>
+        </p:spPr>
+      </p:sp>
+      <p:pic>
+        <p:nvPicPr>
+          <p:cNvPr id="18" name="Image 1" descr="preencoded.png">    </p:cNvPr>
+          <p:cNvPicPr>
+            <a:picLocks noChangeAspect="1"/>
+          </p:cNvPicPr>
+          <p:nvPr/>
+        </p:nvPicPr>
+        <p:blipFill>
+          <a:blip r:embed="rId2"/>
+          <a:stretch>
+            <a:fillRect/>
+          </a:stretch>
+        </p:blipFill>
+        <p:spPr>
+          <a:xfrm>
+            <a:off x="9818319" y="128016"/>
+            <a:ext cx="201168" cy="201168"/>
+          </a:xfrm>
+          <a:prstGeom prst="rect">
+            <a:avLst/>
+          </a:prstGeom>
+        </p:spPr>
+      </p:pic>
+      <p:sp>
+        <p:nvSpPr>
+          <p:cNvPr id="19" name="Text 15"/>
+          <p:cNvSpPr txBox="1"/>
+          <p:nvPr/>
+        </p:nvSpPr>
+        <p:spPr>
+          <a:xfrm>
+            <a:off x="10074351" y="91440"/>
+            <a:ext cx="1532128" cy="274320"/>
+          </a:xfrm>
+          <a:prstGeom prst="rect">
+            <a:avLst/>
+          </a:prstGeom>
+          <a:noFill/>
+          <a:ln/>
+        </p:spPr>
+        <p:txBody>
+          <a:bodyPr wrap="square" lIns="0" tIns="0" rIns="0" bIns="0" rtlCol="0" anchor="ctr"/>
+          <a:lstStyle/>
+          <a:p>
+            <a:pPr indent="0" marL="0">
+              <a:buNone/>
+            </a:pPr>
+            <a:r>
+              <a:rPr lang="en-US" sz="1100" b="1" dirty="0">
+                <a:solidFill>
+                  <a:srgbClr val="6B21A8"/>
+                </a:solidFill>
+                <a:latin typeface="Calibri" pitchFamily="34" charset="0"/>
+                <a:ea typeface="Calibri" pitchFamily="34" charset="-122"/>
+                <a:cs typeface="Calibri" pitchFamily="34" charset="-120"/>
+              </a:rPr>
+              <a:t>UNDERSTAND LATER</a:t>
+            </a:r>
+            <a:endParaRPr lang="en-US" sz="1100" dirty="0"/>
+          </a:p>
+        </p:txBody>
+      </p:sp>
+      <p:sp>
+        <p:nvSpPr>
+          <p:cNvPr id="20" name="Shape 16"/>
+          <p:cNvSpPr/>
+          <p:nvPr/>
+        </p:nvSpPr>
+        <p:spPr>
+          <a:xfrm>
+            <a:off x="8407349" y="91440"/>
+            <a:ext cx="1173226" cy="274320"/>
+          </a:xfrm>
+          <a:prstGeom prst="rect">
+            <a:avLst/>
+          </a:prstGeom>
+          <a:solidFill>
+            <a:srgbClr val="FEF3C7"/>
+          </a:solidFill>
+          <a:ln w="12700">
+            <a:solidFill>
+              <a:srgbClr val="B45309"/>
+            </a:solidFill>
+            <a:prstDash val="solid"/>
+          </a:ln>
+        </p:spPr>
+      </p:sp>
+      <p:sp>
+        <p:nvSpPr>
+          <p:cNvPr id="21" name="Shape 17"/>
+          <p:cNvSpPr/>
+          <p:nvPr/>
+        </p:nvSpPr>
+        <p:spPr>
+          <a:xfrm>
+            <a:off x="8407349" y="91440"/>
+            <a:ext cx="27432" cy="274320"/>
+          </a:xfrm>
+          <a:prstGeom prst="rect">
+            <a:avLst/>
+          </a:prstGeom>
+          <a:solidFill>
+            <a:srgbClr val="B45309"/>
+          </a:solidFill>
+          <a:ln w="12700">
+            <a:solidFill>
+              <a:srgbClr val="B45309"/>
+            </a:solidFill>
+            <a:prstDash val="solid"/>
+          </a:ln>
+        </p:spPr>
+      </p:sp>
+      <p:sp>
+        <p:nvSpPr>
+          <p:cNvPr id="22" name="Shape 18"/>
+          <p:cNvSpPr/>
+          <p:nvPr/>
+        </p:nvSpPr>
+        <p:spPr>
+          <a:xfrm>
+            <a:off x="8462213" y="91440"/>
+            <a:ext cx="27432" cy="274320"/>
+          </a:xfrm>
+          <a:prstGeom prst="rect">
+            <a:avLst/>
+          </a:prstGeom>
+          <a:solidFill>
+            <a:srgbClr val="B45309"/>
+          </a:solidFill>
+          <a:ln w="12700">
+            <a:solidFill>
+              <a:srgbClr val="B45309"/>
+            </a:solidFill>
+            <a:prstDash val="solid"/>
+          </a:ln>
+        </p:spPr>
+      </p:sp>
+      <p:pic>
+        <p:nvPicPr>
+          <p:cNvPr id="23" name="Image 2" descr="preencoded.png">    </p:cNvPr>
+          <p:cNvPicPr>
+            <a:picLocks noChangeAspect="1"/>
+          </p:cNvPicPr>
+          <p:nvPr/>
+        </p:nvPicPr>
+        <p:blipFill>
+          <a:blip r:embed="rId3"/>
+          <a:stretch>
+            <a:fillRect/>
+          </a:stretch>
+        </p:blipFill>
+        <p:spPr>
+          <a:xfrm>
+            <a:off x="8535365" y="128016"/>
+            <a:ext cx="201168" cy="201168"/>
+          </a:xfrm>
+          <a:prstGeom prst="rect">
+            <a:avLst/>
+          </a:prstGeom>
+        </p:spPr>
+      </p:pic>
+      <p:sp>
+        <p:nvSpPr>
+          <p:cNvPr id="24" name="Text 19"/>
+          <p:cNvSpPr txBox="1"/>
+          <p:nvPr/>
+        </p:nvSpPr>
+        <p:spPr>
+          <a:xfrm>
+            <a:off x="8791397" y="91440"/>
+            <a:ext cx="752602" cy="274320"/>
+          </a:xfrm>
+          <a:prstGeom prst="rect">
+            <a:avLst/>
+          </a:prstGeom>
+          <a:noFill/>
+          <a:ln/>
+        </p:spPr>
+        <p:txBody>
+          <a:bodyPr wrap="square" lIns="0" tIns="0" rIns="0" bIns="0" rtlCol="0" anchor="ctr"/>
+          <a:lstStyle/>
+          <a:p>
+            <a:pPr indent="0" marL="0">
+              <a:buNone/>
+            </a:pPr>
+            <a:r>
+              <a:rPr lang="en-US" sz="1100" b="1" dirty="0">
+                <a:solidFill>
+                  <a:srgbClr val="92400E"/>
+                </a:solidFill>
+                <a:latin typeface="Calibri" pitchFamily="34" charset="0"/>
+                <a:ea typeface="Calibri" pitchFamily="34" charset="-122"/>
+                <a:cs typeface="Calibri" pitchFamily="34" charset="-120"/>
+              </a:rPr>
+              <a:t>USE NOW</a:t>
+            </a:r>
+            <a:endParaRPr lang="en-US" sz="1100" dirty="0"/>
+          </a:p>
+        </p:txBody>
+      </p:sp>
+      <p:sp>
+        <p:nvSpPr>
+          <p:cNvPr id="25" name="Shape 20"/>
+          <p:cNvSpPr/>
+          <p:nvPr/>
+        </p:nvSpPr>
+        <p:spPr>
+          <a:xfrm>
+            <a:off x="6518097" y="91440"/>
+            <a:ext cx="1779524" cy="274320"/>
+          </a:xfrm>
+          <a:prstGeom prst="rect">
+            <a:avLst/>
+          </a:prstGeom>
+          <a:solidFill>
+            <a:srgbClr val="E0F2FE"/>
+          </a:solidFill>
+          <a:ln w="12700">
+            <a:solidFill>
+              <a:srgbClr val="0369A1"/>
+            </a:solidFill>
+            <a:prstDash val="solid"/>
+          </a:ln>
+        </p:spPr>
+      </p:sp>
+      <p:sp>
+        <p:nvSpPr>
+          <p:cNvPr id="26" name="Shape 21"/>
+          <p:cNvSpPr/>
+          <p:nvPr/>
+        </p:nvSpPr>
+        <p:spPr>
+          <a:xfrm>
+            <a:off x="6518097" y="91440"/>
+            <a:ext cx="73152" cy="274320"/>
+          </a:xfrm>
+          <a:prstGeom prst="rect">
+            <a:avLst/>
+          </a:prstGeom>
+          <a:solidFill>
+            <a:srgbClr val="0369A1"/>
+          </a:solidFill>
+          <a:ln w="12700">
+            <a:solidFill>
+              <a:srgbClr val="0369A1"/>
+            </a:solidFill>
+            <a:prstDash val="solid"/>
+          </a:ln>
+        </p:spPr>
+      </p:sp>
+      <p:pic>
+        <p:nvPicPr>
+          <p:cNvPr id="27" name="Image 3" descr="preencoded.png">    </p:cNvPr>
+          <p:cNvPicPr>
+            <a:picLocks noChangeAspect="1"/>
+          </p:cNvPicPr>
+          <p:nvPr/>
+        </p:nvPicPr>
+        <p:blipFill>
+          <a:blip r:embed="rId4"/>
+          <a:stretch>
+            <a:fillRect/>
+          </a:stretch>
+        </p:blipFill>
+        <p:spPr>
+          <a:xfrm>
+            <a:off x="6646113" y="128016"/>
+            <a:ext cx="201168" cy="201168"/>
+          </a:xfrm>
+          <a:prstGeom prst="rect">
+            <a:avLst/>
+          </a:prstGeom>
+        </p:spPr>
+      </p:pic>
+      <p:sp>
+        <p:nvSpPr>
+          <p:cNvPr id="28" name="Text 22"/>
+          <p:cNvSpPr txBox="1"/>
+          <p:nvPr/>
+        </p:nvSpPr>
+        <p:spPr>
+          <a:xfrm>
+            <a:off x="6902145" y="91440"/>
+            <a:ext cx="1358900" cy="274320"/>
+          </a:xfrm>
+          <a:prstGeom prst="rect">
+            <a:avLst/>
+          </a:prstGeom>
+          <a:noFill/>
+          <a:ln/>
+        </p:spPr>
+        <p:txBody>
+          <a:bodyPr wrap="square" lIns="0" tIns="0" rIns="0" bIns="0" rtlCol="0" anchor="ctr"/>
+          <a:lstStyle/>
+          <a:p>
+            <a:pPr indent="0" marL="0">
+              <a:buNone/>
+            </a:pPr>
+            <a:r>
+              <a:rPr lang="en-US" sz="1100" b="1" dirty="0">
+                <a:solidFill>
+                  <a:srgbClr val="075985"/>
+                </a:solidFill>
+                <a:latin typeface="Calibri" pitchFamily="34" charset="0"/>
+                <a:ea typeface="Calibri" pitchFamily="34" charset="-122"/>
+                <a:cs typeface="Calibri" pitchFamily="34" charset="-120"/>
+              </a:rPr>
+              <a:t>UNDERSTAND NOW</a:t>
+            </a:r>
+            <a:endParaRPr lang="en-US" sz="1100" dirty="0"/>
+          </a:p>
+        </p:txBody>
+      </p:sp>
       <p:sp>
         <p:nvSpPr>
           <p:cNvPr id="25" name="Slide Number Placeholder 0"/>
@@ -3809,6 +4231,158 @@
       </p:graphicFrame>
       <p:sp>
         <p:nvSpPr>
+          <p:cNvPr id="4" name="Shape 1"/>
+          <p:cNvSpPr/>
+          <p:nvPr/>
+        </p:nvSpPr>
+        <p:spPr>
+          <a:xfrm>
+            <a:off x="9287967" y="91440"/>
+            <a:ext cx="2355088" cy="274320"/>
+          </a:xfrm>
+          <a:prstGeom prst="rect">
+            <a:avLst/>
+          </a:prstGeom>
+          <a:solidFill>
+            <a:srgbClr val="FEF3C7"/>
+          </a:solidFill>
+          <a:ln w="12700">
+            <a:solidFill>
+              <a:srgbClr val="B45309"/>
+            </a:solidFill>
+            <a:prstDash val="solid"/>
+          </a:ln>
+        </p:spPr>
+      </p:sp>
+      <p:sp>
+        <p:nvSpPr>
+          <p:cNvPr id="5" name="Shape 2"/>
+          <p:cNvSpPr/>
+          <p:nvPr/>
+        </p:nvSpPr>
+        <p:spPr>
+          <a:xfrm>
+            <a:off x="9287967" y="91440"/>
+            <a:ext cx="27432" cy="274320"/>
+          </a:xfrm>
+          <a:prstGeom prst="rect">
+            <a:avLst/>
+          </a:prstGeom>
+          <a:solidFill>
+            <a:srgbClr val="B45309"/>
+          </a:solidFill>
+          <a:ln w="12700">
+            <a:solidFill>
+              <a:srgbClr val="B45309"/>
+            </a:solidFill>
+            <a:prstDash val="solid"/>
+          </a:ln>
+        </p:spPr>
+      </p:sp>
+      <p:sp>
+        <p:nvSpPr>
+          <p:cNvPr id="6" name="Shape 3"/>
+          <p:cNvSpPr/>
+          <p:nvPr/>
+        </p:nvSpPr>
+        <p:spPr>
+          <a:xfrm>
+            <a:off x="9342831" y="91440"/>
+            <a:ext cx="27432" cy="274320"/>
+          </a:xfrm>
+          <a:prstGeom prst="rect">
+            <a:avLst/>
+          </a:prstGeom>
+          <a:solidFill>
+            <a:srgbClr val="B45309"/>
+          </a:solidFill>
+          <a:ln w="12700">
+            <a:solidFill>
+              <a:srgbClr val="B45309"/>
+            </a:solidFill>
+            <a:prstDash val="solid"/>
+          </a:ln>
+        </p:spPr>
+      </p:sp>
+      <p:pic>
+        <p:nvPicPr>
+          <p:cNvPr id="7" name="Image 0" descr="preencoded.png">    </p:cNvPr>
+          <p:cNvPicPr>
+            <a:picLocks noChangeAspect="1"/>
+          </p:cNvPicPr>
+          <p:nvPr/>
+        </p:nvPicPr>
+        <p:blipFill>
+          <a:blip r:embed="rId1"/>
+          <a:stretch>
+            <a:fillRect/>
+          </a:stretch>
+        </p:blipFill>
+        <p:spPr>
+          <a:xfrm>
+            <a:off x="9415983" y="128016"/>
+            <a:ext cx="201168" cy="201168"/>
+          </a:xfrm>
+          <a:prstGeom prst="rect">
+            <a:avLst/>
+          </a:prstGeom>
+        </p:spPr>
+      </p:pic>
+      <p:sp>
+        <p:nvSpPr>
+          <p:cNvPr id="8" name="Text 4"/>
+          <p:cNvSpPr txBox="1"/>
+          <p:nvPr/>
+        </p:nvSpPr>
+        <p:spPr>
+          <a:xfrm>
+            <a:off x="9672015" y="91440"/>
+            <a:ext cx="1934464" cy="274320"/>
+          </a:xfrm>
+          <a:prstGeom prst="rect">
+            <a:avLst/>
+          </a:prstGeom>
+          <a:noFill/>
+          <a:ln/>
+        </p:spPr>
+        <p:txBody>
+          <a:bodyPr wrap="square" lIns="0" tIns="0" rIns="0" bIns="0" rtlCol="0" anchor="ctr"/>
+          <a:lstStyle/>
+          <a:p>
+            <a:pPr indent="0" marL="0">
+              <a:buNone/>
+            </a:pPr>
+            <a:r>
+              <a:rPr lang="en-US" sz="1100" b="1" dirty="0">
+                <a:solidFill>
+                  <a:srgbClr val="92400E"/>
+                </a:solidFill>
+                <a:latin typeface="Calibri" pitchFamily="34" charset="0"/>
+                <a:ea typeface="Calibri" pitchFamily="34" charset="-122"/>
+                <a:cs typeface="Calibri" pitchFamily="34" charset="-120"/>
+              </a:rPr>
+              <a:t>USE NOW</a:t>
+            </a:r>
+            <a:pPr indent="0" marL="0">
+              <a:buNone/>
+            </a:pPr>
+            <a:r>
+              <a:rPr lang="en-US" sz="1100" dirty="0">
+                <a:solidFill>
+                  <a:srgbClr val="92400E"/>
+                </a:solidFill>
+                <a:latin typeface="Calibri" pitchFamily="34" charset="0"/>
+                <a:ea typeface="Calibri" pitchFamily="34" charset="-122"/>
+                <a:cs typeface="Calibri" pitchFamily="34" charset="-120"/>
+              </a:rPr>
+              <a:t> · the PRG32 tools</a:t>
+            </a:r>
+            <a:endParaRPr lang="en-US" sz="1100" dirty="0"/>
+          </a:p>
+        </p:txBody>
+      </p:sp>
+      <p:sp>
+        <p:nvSpPr>
           <p:cNvPr id="25" name="Slide Number Placeholder 0"/>
           <p:cNvSpPr>
             <a:spLocks noGrp="1"/>
@@ -5641,6 +6215,158 @@
       </p:sp>
       <p:sp>
         <p:nvSpPr>
+          <p:cNvPr id="5" name="Shape 3"/>
+          <p:cNvSpPr/>
+          <p:nvPr/>
+        </p:nvSpPr>
+        <p:spPr>
+          <a:xfrm>
+            <a:off x="8959672" y="91440"/>
+            <a:ext cx="2683383" cy="274320"/>
+          </a:xfrm>
+          <a:prstGeom prst="rect">
+            <a:avLst/>
+          </a:prstGeom>
+          <a:solidFill>
+            <a:srgbClr val="FEF3C7"/>
+          </a:solidFill>
+          <a:ln w="12700">
+            <a:solidFill>
+              <a:srgbClr val="B45309"/>
+            </a:solidFill>
+            <a:prstDash val="solid"/>
+          </a:ln>
+        </p:spPr>
+      </p:sp>
+      <p:sp>
+        <p:nvSpPr>
+          <p:cNvPr id="6" name="Shape 4"/>
+          <p:cNvSpPr/>
+          <p:nvPr/>
+        </p:nvSpPr>
+        <p:spPr>
+          <a:xfrm>
+            <a:off x="8959672" y="91440"/>
+            <a:ext cx="27432" cy="274320"/>
+          </a:xfrm>
+          <a:prstGeom prst="rect">
+            <a:avLst/>
+          </a:prstGeom>
+          <a:solidFill>
+            <a:srgbClr val="B45309"/>
+          </a:solidFill>
+          <a:ln w="12700">
+            <a:solidFill>
+              <a:srgbClr val="B45309"/>
+            </a:solidFill>
+            <a:prstDash val="solid"/>
+          </a:ln>
+        </p:spPr>
+      </p:sp>
+      <p:sp>
+        <p:nvSpPr>
+          <p:cNvPr id="7" name="Shape 5"/>
+          <p:cNvSpPr/>
+          <p:nvPr/>
+        </p:nvSpPr>
+        <p:spPr>
+          <a:xfrm>
+            <a:off x="9014536" y="91440"/>
+            <a:ext cx="27432" cy="274320"/>
+          </a:xfrm>
+          <a:prstGeom prst="rect">
+            <a:avLst/>
+          </a:prstGeom>
+          <a:solidFill>
+            <a:srgbClr val="B45309"/>
+          </a:solidFill>
+          <a:ln w="12700">
+            <a:solidFill>
+              <a:srgbClr val="B45309"/>
+            </a:solidFill>
+            <a:prstDash val="solid"/>
+          </a:ln>
+        </p:spPr>
+      </p:sp>
+      <p:pic>
+        <p:nvPicPr>
+          <p:cNvPr id="8" name="Image 0" descr="preencoded.png">    </p:cNvPr>
+          <p:cNvPicPr>
+            <a:picLocks noChangeAspect="1"/>
+          </p:cNvPicPr>
+          <p:nvPr/>
+        </p:nvPicPr>
+        <p:blipFill>
+          <a:blip r:embed="rId1"/>
+          <a:stretch>
+            <a:fillRect/>
+          </a:stretch>
+        </p:blipFill>
+        <p:spPr>
+          <a:xfrm>
+            <a:off x="9087688" y="128016"/>
+            <a:ext cx="201168" cy="201168"/>
+          </a:xfrm>
+          <a:prstGeom prst="rect">
+            <a:avLst/>
+          </a:prstGeom>
+        </p:spPr>
+      </p:pic>
+      <p:sp>
+        <p:nvSpPr>
+          <p:cNvPr id="9" name="Text 6"/>
+          <p:cNvSpPr txBox="1"/>
+          <p:nvPr/>
+        </p:nvSpPr>
+        <p:spPr>
+          <a:xfrm>
+            <a:off x="9343720" y="91440"/>
+            <a:ext cx="2262759" cy="274320"/>
+          </a:xfrm>
+          <a:prstGeom prst="rect">
+            <a:avLst/>
+          </a:prstGeom>
+          <a:noFill/>
+          <a:ln/>
+        </p:spPr>
+        <p:txBody>
+          <a:bodyPr wrap="square" lIns="0" tIns="0" rIns="0" bIns="0" rtlCol="0" anchor="ctr"/>
+          <a:lstStyle/>
+          <a:p>
+            <a:pPr indent="0" marL="0">
+              <a:buNone/>
+            </a:pPr>
+            <a:r>
+              <a:rPr lang="en-US" sz="1100" b="1" dirty="0">
+                <a:solidFill>
+                  <a:srgbClr val="92400E"/>
+                </a:solidFill>
+                <a:latin typeface="Calibri" pitchFamily="34" charset="0"/>
+                <a:ea typeface="Calibri" pitchFamily="34" charset="-122"/>
+                <a:cs typeface="Calibri" pitchFamily="34" charset="-120"/>
+              </a:rPr>
+              <a:t>USE NOW</a:t>
+            </a:r>
+            <a:pPr indent="0" marL="0">
+              <a:buNone/>
+            </a:pPr>
+            <a:r>
+              <a:rPr lang="en-US" sz="1100" dirty="0">
+                <a:solidFill>
+                  <a:srgbClr val="92400E"/>
+                </a:solidFill>
+                <a:latin typeface="Calibri" pitchFamily="34" charset="0"/>
+                <a:ea typeface="Calibri" pitchFamily="34" charset="-122"/>
+                <a:cs typeface="Calibri" pitchFamily="34" charset="-120"/>
+              </a:rPr>
+              <a:t> · the complete program</a:t>
+            </a:r>
+            <a:endParaRPr lang="en-US" sz="1100" dirty="0"/>
+          </a:p>
+        </p:txBody>
+      </p:sp>
+      <p:sp>
+        <p:nvSpPr>
           <p:cNvPr id="25" name="Slide Number Placeholder 0"/>
           <p:cNvSpPr>
             <a:spLocks noGrp="1"/>
@@ -6338,6 +7064,158 @@
       </p:sp>
       <p:sp>
         <p:nvSpPr>
+          <p:cNvPr id="5" name="Shape 3"/>
+          <p:cNvSpPr/>
+          <p:nvPr/>
+        </p:nvSpPr>
+        <p:spPr>
+          <a:xfrm>
+            <a:off x="8959672" y="91440"/>
+            <a:ext cx="2683383" cy="274320"/>
+          </a:xfrm>
+          <a:prstGeom prst="rect">
+            <a:avLst/>
+          </a:prstGeom>
+          <a:solidFill>
+            <a:srgbClr val="FEF3C7"/>
+          </a:solidFill>
+          <a:ln w="12700">
+            <a:solidFill>
+              <a:srgbClr val="B45309"/>
+            </a:solidFill>
+            <a:prstDash val="solid"/>
+          </a:ln>
+        </p:spPr>
+      </p:sp>
+      <p:sp>
+        <p:nvSpPr>
+          <p:cNvPr id="6" name="Shape 4"/>
+          <p:cNvSpPr/>
+          <p:nvPr/>
+        </p:nvSpPr>
+        <p:spPr>
+          <a:xfrm>
+            <a:off x="8959672" y="91440"/>
+            <a:ext cx="27432" cy="274320"/>
+          </a:xfrm>
+          <a:prstGeom prst="rect">
+            <a:avLst/>
+          </a:prstGeom>
+          <a:solidFill>
+            <a:srgbClr val="B45309"/>
+          </a:solidFill>
+          <a:ln w="12700">
+            <a:solidFill>
+              <a:srgbClr val="B45309"/>
+            </a:solidFill>
+            <a:prstDash val="solid"/>
+          </a:ln>
+        </p:spPr>
+      </p:sp>
+      <p:sp>
+        <p:nvSpPr>
+          <p:cNvPr id="7" name="Shape 5"/>
+          <p:cNvSpPr/>
+          <p:nvPr/>
+        </p:nvSpPr>
+        <p:spPr>
+          <a:xfrm>
+            <a:off x="9014536" y="91440"/>
+            <a:ext cx="27432" cy="274320"/>
+          </a:xfrm>
+          <a:prstGeom prst="rect">
+            <a:avLst/>
+          </a:prstGeom>
+          <a:solidFill>
+            <a:srgbClr val="B45309"/>
+          </a:solidFill>
+          <a:ln w="12700">
+            <a:solidFill>
+              <a:srgbClr val="B45309"/>
+            </a:solidFill>
+            <a:prstDash val="solid"/>
+          </a:ln>
+        </p:spPr>
+      </p:sp>
+      <p:pic>
+        <p:nvPicPr>
+          <p:cNvPr id="8" name="Image 0" descr="preencoded.png">    </p:cNvPr>
+          <p:cNvPicPr>
+            <a:picLocks noChangeAspect="1"/>
+          </p:cNvPicPr>
+          <p:nvPr/>
+        </p:nvPicPr>
+        <p:blipFill>
+          <a:blip r:embed="rId1"/>
+          <a:stretch>
+            <a:fillRect/>
+          </a:stretch>
+        </p:blipFill>
+        <p:spPr>
+          <a:xfrm>
+            <a:off x="9087688" y="128016"/>
+            <a:ext cx="201168" cy="201168"/>
+          </a:xfrm>
+          <a:prstGeom prst="rect">
+            <a:avLst/>
+          </a:prstGeom>
+        </p:spPr>
+      </p:pic>
+      <p:sp>
+        <p:nvSpPr>
+          <p:cNvPr id="9" name="Text 6"/>
+          <p:cNvSpPr txBox="1"/>
+          <p:nvPr/>
+        </p:nvSpPr>
+        <p:spPr>
+          <a:xfrm>
+            <a:off x="9343720" y="91440"/>
+            <a:ext cx="2262759" cy="274320"/>
+          </a:xfrm>
+          <a:prstGeom prst="rect">
+            <a:avLst/>
+          </a:prstGeom>
+          <a:noFill/>
+          <a:ln/>
+        </p:spPr>
+        <p:txBody>
+          <a:bodyPr wrap="square" lIns="0" tIns="0" rIns="0" bIns="0" rtlCol="0" anchor="ctr"/>
+          <a:lstStyle/>
+          <a:p>
+            <a:pPr indent="0" marL="0">
+              <a:buNone/>
+            </a:pPr>
+            <a:r>
+              <a:rPr lang="en-US" sz="1100" b="1" dirty="0">
+                <a:solidFill>
+                  <a:srgbClr val="92400E"/>
+                </a:solidFill>
+                <a:latin typeface="Calibri" pitchFamily="34" charset="0"/>
+                <a:ea typeface="Calibri" pitchFamily="34" charset="-122"/>
+                <a:cs typeface="Calibri" pitchFamily="34" charset="-120"/>
+              </a:rPr>
+              <a:t>USE NOW</a:t>
+            </a:r>
+            <a:pPr indent="0" marL="0">
+              <a:buNone/>
+            </a:pPr>
+            <a:r>
+              <a:rPr lang="en-US" sz="1100" dirty="0">
+                <a:solidFill>
+                  <a:srgbClr val="92400E"/>
+                </a:solidFill>
+                <a:latin typeface="Calibri" pitchFamily="34" charset="0"/>
+                <a:ea typeface="Calibri" pitchFamily="34" charset="-122"/>
+                <a:cs typeface="Calibri" pitchFamily="34" charset="-120"/>
+              </a:rPr>
+              <a:t> · the complete program</a:t>
+            </a:r>
+            <a:endParaRPr lang="en-US" sz="1100" dirty="0"/>
+          </a:p>
+        </p:txBody>
+      </p:sp>
+      <p:sp>
+        <p:nvSpPr>
           <p:cNvPr id="25" name="Slide Number Placeholder 0"/>
           <p:cNvSpPr>
             <a:spLocks noGrp="1"/>
@@ -7491,6 +8369,158 @@
       </p:sp>
       <p:sp>
         <p:nvSpPr>
+          <p:cNvPr id="17" name="Shape 15"/>
+          <p:cNvSpPr/>
+          <p:nvPr/>
+        </p:nvSpPr>
+        <p:spPr>
+          <a:xfrm>
+            <a:off x="9287967" y="91440"/>
+            <a:ext cx="2355088" cy="274320"/>
+          </a:xfrm>
+          <a:prstGeom prst="rect">
+            <a:avLst/>
+          </a:prstGeom>
+          <a:solidFill>
+            <a:srgbClr val="FEF3C7"/>
+          </a:solidFill>
+          <a:ln w="12700">
+            <a:solidFill>
+              <a:srgbClr val="B45309"/>
+            </a:solidFill>
+            <a:prstDash val="solid"/>
+          </a:ln>
+        </p:spPr>
+      </p:sp>
+      <p:sp>
+        <p:nvSpPr>
+          <p:cNvPr id="18" name="Shape 16"/>
+          <p:cNvSpPr/>
+          <p:nvPr/>
+        </p:nvSpPr>
+        <p:spPr>
+          <a:xfrm>
+            <a:off x="9287967" y="91440"/>
+            <a:ext cx="27432" cy="274320"/>
+          </a:xfrm>
+          <a:prstGeom prst="rect">
+            <a:avLst/>
+          </a:prstGeom>
+          <a:solidFill>
+            <a:srgbClr val="B45309"/>
+          </a:solidFill>
+          <a:ln w="12700">
+            <a:solidFill>
+              <a:srgbClr val="B45309"/>
+            </a:solidFill>
+            <a:prstDash val="solid"/>
+          </a:ln>
+        </p:spPr>
+      </p:sp>
+      <p:sp>
+        <p:nvSpPr>
+          <p:cNvPr id="19" name="Shape 17"/>
+          <p:cNvSpPr/>
+          <p:nvPr/>
+        </p:nvSpPr>
+        <p:spPr>
+          <a:xfrm>
+            <a:off x="9342831" y="91440"/>
+            <a:ext cx="27432" cy="274320"/>
+          </a:xfrm>
+          <a:prstGeom prst="rect">
+            <a:avLst/>
+          </a:prstGeom>
+          <a:solidFill>
+            <a:srgbClr val="B45309"/>
+          </a:solidFill>
+          <a:ln w="12700">
+            <a:solidFill>
+              <a:srgbClr val="B45309"/>
+            </a:solidFill>
+            <a:prstDash val="solid"/>
+          </a:ln>
+        </p:spPr>
+      </p:sp>
+      <p:pic>
+        <p:nvPicPr>
+          <p:cNvPr id="20" name="Image 0" descr="preencoded.png">    </p:cNvPr>
+          <p:cNvPicPr>
+            <a:picLocks noChangeAspect="1"/>
+          </p:cNvPicPr>
+          <p:nvPr/>
+        </p:nvPicPr>
+        <p:blipFill>
+          <a:blip r:embed="rId1"/>
+          <a:stretch>
+            <a:fillRect/>
+          </a:stretch>
+        </p:blipFill>
+        <p:spPr>
+          <a:xfrm>
+            <a:off x="9415983" y="128016"/>
+            <a:ext cx="201168" cy="201168"/>
+          </a:xfrm>
+          <a:prstGeom prst="rect">
+            <a:avLst/>
+          </a:prstGeom>
+        </p:spPr>
+      </p:pic>
+      <p:sp>
+        <p:nvSpPr>
+          <p:cNvPr id="21" name="Text 18"/>
+          <p:cNvSpPr txBox="1"/>
+          <p:nvPr/>
+        </p:nvSpPr>
+        <p:spPr>
+          <a:xfrm>
+            <a:off x="9672015" y="91440"/>
+            <a:ext cx="1934464" cy="274320"/>
+          </a:xfrm>
+          <a:prstGeom prst="rect">
+            <a:avLst/>
+          </a:prstGeom>
+          <a:noFill/>
+          <a:ln/>
+        </p:spPr>
+        <p:txBody>
+          <a:bodyPr wrap="square" lIns="0" tIns="0" rIns="0" bIns="0" rtlCol="0" anchor="ctr"/>
+          <a:lstStyle/>
+          <a:p>
+            <a:pPr indent="0" marL="0">
+              <a:buNone/>
+            </a:pPr>
+            <a:r>
+              <a:rPr lang="en-US" sz="1100" b="1" dirty="0">
+                <a:solidFill>
+                  <a:srgbClr val="92400E"/>
+                </a:solidFill>
+                <a:latin typeface="Calibri" pitchFamily="34" charset="0"/>
+                <a:ea typeface="Calibri" pitchFamily="34" charset="-122"/>
+                <a:cs typeface="Calibri" pitchFamily="34" charset="-120"/>
+              </a:rPr>
+              <a:t>USE NOW</a:t>
+            </a:r>
+            <a:pPr indent="0" marL="0">
+              <a:buNone/>
+            </a:pPr>
+            <a:r>
+              <a:rPr lang="en-US" sz="1100" dirty="0">
+                <a:solidFill>
+                  <a:srgbClr val="92400E"/>
+                </a:solidFill>
+                <a:latin typeface="Calibri" pitchFamily="34" charset="0"/>
+                <a:ea typeface="Calibri" pitchFamily="34" charset="-122"/>
+                <a:cs typeface="Calibri" pitchFamily="34" charset="-120"/>
+              </a:rPr>
+              <a:t> · the PRG32 tools</a:t>
+            </a:r>
+            <a:endParaRPr lang="en-US" sz="1100" dirty="0"/>
+          </a:p>
+        </p:txBody>
+      </p:sp>
+      <p:sp>
+        <p:nvSpPr>
           <p:cNvPr id="25" name="Slide Number Placeholder 0"/>
           <p:cNvSpPr>
             <a:spLocks noGrp="1"/>
@@ -8327,6 +9357,158 @@
       </p:sp>
       <p:sp>
         <p:nvSpPr>
+          <p:cNvPr id="17" name="Shape 15"/>
+          <p:cNvSpPr/>
+          <p:nvPr/>
+        </p:nvSpPr>
+        <p:spPr>
+          <a:xfrm>
+            <a:off x="9287967" y="91440"/>
+            <a:ext cx="2355088" cy="274320"/>
+          </a:xfrm>
+          <a:prstGeom prst="rect">
+            <a:avLst/>
+          </a:prstGeom>
+          <a:solidFill>
+            <a:srgbClr val="FEF3C7"/>
+          </a:solidFill>
+          <a:ln w="12700">
+            <a:solidFill>
+              <a:srgbClr val="B45309"/>
+            </a:solidFill>
+            <a:prstDash val="solid"/>
+          </a:ln>
+        </p:spPr>
+      </p:sp>
+      <p:sp>
+        <p:nvSpPr>
+          <p:cNvPr id="18" name="Shape 16"/>
+          <p:cNvSpPr/>
+          <p:nvPr/>
+        </p:nvSpPr>
+        <p:spPr>
+          <a:xfrm>
+            <a:off x="9287967" y="91440"/>
+            <a:ext cx="27432" cy="274320"/>
+          </a:xfrm>
+          <a:prstGeom prst="rect">
+            <a:avLst/>
+          </a:prstGeom>
+          <a:solidFill>
+            <a:srgbClr val="B45309"/>
+          </a:solidFill>
+          <a:ln w="12700">
+            <a:solidFill>
+              <a:srgbClr val="B45309"/>
+            </a:solidFill>
+            <a:prstDash val="solid"/>
+          </a:ln>
+        </p:spPr>
+      </p:sp>
+      <p:sp>
+        <p:nvSpPr>
+          <p:cNvPr id="19" name="Shape 17"/>
+          <p:cNvSpPr/>
+          <p:nvPr/>
+        </p:nvSpPr>
+        <p:spPr>
+          <a:xfrm>
+            <a:off x="9342831" y="91440"/>
+            <a:ext cx="27432" cy="274320"/>
+          </a:xfrm>
+          <a:prstGeom prst="rect">
+            <a:avLst/>
+          </a:prstGeom>
+          <a:solidFill>
+            <a:srgbClr val="B45309"/>
+          </a:solidFill>
+          <a:ln w="12700">
+            <a:solidFill>
+              <a:srgbClr val="B45309"/>
+            </a:solidFill>
+            <a:prstDash val="solid"/>
+          </a:ln>
+        </p:spPr>
+      </p:sp>
+      <p:pic>
+        <p:nvPicPr>
+          <p:cNvPr id="20" name="Image 0" descr="preencoded.png">    </p:cNvPr>
+          <p:cNvPicPr>
+            <a:picLocks noChangeAspect="1"/>
+          </p:cNvPicPr>
+          <p:nvPr/>
+        </p:nvPicPr>
+        <p:blipFill>
+          <a:blip r:embed="rId1"/>
+          <a:stretch>
+            <a:fillRect/>
+          </a:stretch>
+        </p:blipFill>
+        <p:spPr>
+          <a:xfrm>
+            <a:off x="9415983" y="128016"/>
+            <a:ext cx="201168" cy="201168"/>
+          </a:xfrm>
+          <a:prstGeom prst="rect">
+            <a:avLst/>
+          </a:prstGeom>
+        </p:spPr>
+      </p:pic>
+      <p:sp>
+        <p:nvSpPr>
+          <p:cNvPr id="21" name="Text 18"/>
+          <p:cNvSpPr txBox="1"/>
+          <p:nvPr/>
+        </p:nvSpPr>
+        <p:spPr>
+          <a:xfrm>
+            <a:off x="9672015" y="91440"/>
+            <a:ext cx="1934464" cy="274320"/>
+          </a:xfrm>
+          <a:prstGeom prst="rect">
+            <a:avLst/>
+          </a:prstGeom>
+          <a:noFill/>
+          <a:ln/>
+        </p:spPr>
+        <p:txBody>
+          <a:bodyPr wrap="square" lIns="0" tIns="0" rIns="0" bIns="0" rtlCol="0" anchor="ctr"/>
+          <a:lstStyle/>
+          <a:p>
+            <a:pPr indent="0" marL="0">
+              <a:buNone/>
+            </a:pPr>
+            <a:r>
+              <a:rPr lang="en-US" sz="1100" b="1" dirty="0">
+                <a:solidFill>
+                  <a:srgbClr val="92400E"/>
+                </a:solidFill>
+                <a:latin typeface="Calibri" pitchFamily="34" charset="0"/>
+                <a:ea typeface="Calibri" pitchFamily="34" charset="-122"/>
+                <a:cs typeface="Calibri" pitchFamily="34" charset="-120"/>
+              </a:rPr>
+              <a:t>USE NOW</a:t>
+            </a:r>
+            <a:pPr indent="0" marL="0">
+              <a:buNone/>
+            </a:pPr>
+            <a:r>
+              <a:rPr lang="en-US" sz="1100" dirty="0">
+                <a:solidFill>
+                  <a:srgbClr val="92400E"/>
+                </a:solidFill>
+                <a:latin typeface="Calibri" pitchFamily="34" charset="0"/>
+                <a:ea typeface="Calibri" pitchFamily="34" charset="-122"/>
+                <a:cs typeface="Calibri" pitchFamily="34" charset="-120"/>
+              </a:rPr>
+              <a:t> · the PRG32 tools</a:t>
+            </a:r>
+            <a:endParaRPr lang="en-US" sz="1100" dirty="0"/>
+          </a:p>
+        </p:txBody>
+      </p:sp>
+      <p:sp>
+        <p:nvSpPr>
           <p:cNvPr id="25" name="Slide Number Placeholder 0"/>
           <p:cNvSpPr>
             <a:spLocks noGrp="1"/>
@@ -9158,6 +10340,158 @@
               <a:t>A black screen: check the wiring of the display against the firmware</a:t>
             </a:r>
             <a:endParaRPr lang="en-US" sz="1200" dirty="0"/>
+          </a:p>
+        </p:txBody>
+      </p:sp>
+      <p:sp>
+        <p:nvSpPr>
+          <p:cNvPr id="17" name="Shape 15"/>
+          <p:cNvSpPr/>
+          <p:nvPr/>
+        </p:nvSpPr>
+        <p:spPr>
+          <a:xfrm>
+            <a:off x="9287967" y="91440"/>
+            <a:ext cx="2355088" cy="274320"/>
+          </a:xfrm>
+          <a:prstGeom prst="rect">
+            <a:avLst/>
+          </a:prstGeom>
+          <a:solidFill>
+            <a:srgbClr val="FEF3C7"/>
+          </a:solidFill>
+          <a:ln w="12700">
+            <a:solidFill>
+              <a:srgbClr val="B45309"/>
+            </a:solidFill>
+            <a:prstDash val="solid"/>
+          </a:ln>
+        </p:spPr>
+      </p:sp>
+      <p:sp>
+        <p:nvSpPr>
+          <p:cNvPr id="18" name="Shape 16"/>
+          <p:cNvSpPr/>
+          <p:nvPr/>
+        </p:nvSpPr>
+        <p:spPr>
+          <a:xfrm>
+            <a:off x="9287967" y="91440"/>
+            <a:ext cx="27432" cy="274320"/>
+          </a:xfrm>
+          <a:prstGeom prst="rect">
+            <a:avLst/>
+          </a:prstGeom>
+          <a:solidFill>
+            <a:srgbClr val="B45309"/>
+          </a:solidFill>
+          <a:ln w="12700">
+            <a:solidFill>
+              <a:srgbClr val="B45309"/>
+            </a:solidFill>
+            <a:prstDash val="solid"/>
+          </a:ln>
+        </p:spPr>
+      </p:sp>
+      <p:sp>
+        <p:nvSpPr>
+          <p:cNvPr id="19" name="Shape 17"/>
+          <p:cNvSpPr/>
+          <p:nvPr/>
+        </p:nvSpPr>
+        <p:spPr>
+          <a:xfrm>
+            <a:off x="9342831" y="91440"/>
+            <a:ext cx="27432" cy="274320"/>
+          </a:xfrm>
+          <a:prstGeom prst="rect">
+            <a:avLst/>
+          </a:prstGeom>
+          <a:solidFill>
+            <a:srgbClr val="B45309"/>
+          </a:solidFill>
+          <a:ln w="12700">
+            <a:solidFill>
+              <a:srgbClr val="B45309"/>
+            </a:solidFill>
+            <a:prstDash val="solid"/>
+          </a:ln>
+        </p:spPr>
+      </p:sp>
+      <p:pic>
+        <p:nvPicPr>
+          <p:cNvPr id="20" name="Image 0" descr="preencoded.png">    </p:cNvPr>
+          <p:cNvPicPr>
+            <a:picLocks noChangeAspect="1"/>
+          </p:cNvPicPr>
+          <p:nvPr/>
+        </p:nvPicPr>
+        <p:blipFill>
+          <a:blip r:embed="rId1"/>
+          <a:stretch>
+            <a:fillRect/>
+          </a:stretch>
+        </p:blipFill>
+        <p:spPr>
+          <a:xfrm>
+            <a:off x="9415983" y="128016"/>
+            <a:ext cx="201168" cy="201168"/>
+          </a:xfrm>
+          <a:prstGeom prst="rect">
+            <a:avLst/>
+          </a:prstGeom>
+        </p:spPr>
+      </p:pic>
+      <p:sp>
+        <p:nvSpPr>
+          <p:cNvPr id="21" name="Text 18"/>
+          <p:cNvSpPr txBox="1"/>
+          <p:nvPr/>
+        </p:nvSpPr>
+        <p:spPr>
+          <a:xfrm>
+            <a:off x="9672015" y="91440"/>
+            <a:ext cx="1934464" cy="274320"/>
+          </a:xfrm>
+          <a:prstGeom prst="rect">
+            <a:avLst/>
+          </a:prstGeom>
+          <a:noFill/>
+          <a:ln/>
+        </p:spPr>
+        <p:txBody>
+          <a:bodyPr wrap="square" lIns="0" tIns="0" rIns="0" bIns="0" rtlCol="0" anchor="ctr"/>
+          <a:lstStyle/>
+          <a:p>
+            <a:pPr indent="0" marL="0">
+              <a:buNone/>
+            </a:pPr>
+            <a:r>
+              <a:rPr lang="en-US" sz="1100" b="1" dirty="0">
+                <a:solidFill>
+                  <a:srgbClr val="92400E"/>
+                </a:solidFill>
+                <a:latin typeface="Calibri" pitchFamily="34" charset="0"/>
+                <a:ea typeface="Calibri" pitchFamily="34" charset="-122"/>
+                <a:cs typeface="Calibri" pitchFamily="34" charset="-120"/>
+              </a:rPr>
+              <a:t>USE NOW</a:t>
+            </a:r>
+            <a:pPr indent="0" marL="0">
+              <a:buNone/>
+            </a:pPr>
+            <a:r>
+              <a:rPr lang="en-US" sz="1100" dirty="0">
+                <a:solidFill>
+                  <a:srgbClr val="92400E"/>
+                </a:solidFill>
+                <a:latin typeface="Calibri" pitchFamily="34" charset="0"/>
+                <a:ea typeface="Calibri" pitchFamily="34" charset="-122"/>
+                <a:cs typeface="Calibri" pitchFamily="34" charset="-120"/>
+              </a:rPr>
+              <a:t> · the PRG32 tools</a:t>
+            </a:r>
+            <a:endParaRPr lang="en-US" sz="1100" dirty="0"/>
           </a:p>
         </p:txBody>
       </p:sp>

--- a/en/slides/00-Computer_Architecture-Course_Introduction-Code.pptx
+++ b/en/slides/00-Computer_Architecture-Course_Introduction-Code.pptx
@@ -116,24 +116,24 @@
   <p:extLst>
     <p:ext uri="{521415D9-36F7-43E2-AB2F-B90AF26B5E84}">
       <p14:sectionLst xmlns:p14="http://schemas.microsoft.com/office/powerpoint/2010/main">
-        <p14:section name="Opening" id="{36258862-6859-27cd-fd8e-3551376115ab}">
+        <p14:section name="Opening" id="{1cd98b2a-dc7d-dd9f-e247-12715879c3e2}">
           <p14:sldIdLst>
             <p14:sldId id="256"/>
             <p14:sldId id="257"/>
           </p14:sldIdLst>
         </p14:section>
-        <p14:section name="Material and first contact" id="{d11b5065-2150-1e9b-b19d-09b591d6e888}">
+        <p14:section name="Material and first contact" id="{2fa7a465-d88f-8a1b-b01e-13c3cfc24208}">
           <p14:sldIdLst>
             <p14:sldId id="258"/>
           </p14:sldIdLst>
         </p14:section>
-        <p14:section name="The complete program" id="{d3c1d01e-1a36-eafb-2021-5732982d0a86}">
+        <p14:section name="The complete program" id="{cc2b4746-892c-9476-8918-fecb9a7d4978}">
           <p14:sldIdLst>
             <p14:sldId id="259"/>
             <p14:sldId id="260"/>
           </p14:sldIdLst>
         </p14:section>
-        <p14:section name="Run it and test it" id="{80a4b8a9-d3f9-1223-64a5-3e9b87790bd6}">
+        <p14:section name="Run it and test it" id="{ac354c50-1665-fda6-c7e2-d8dc25673172}">
           <p14:sldIdLst>
             <p14:sldId id="261"/>
             <p14:sldId id="262"/>
